--- a/dist/초6/사회·역사/현대사회와평화/초6_사회·역사_현대사회와평화_01_민주주의의발전_학생용.pptx
+++ b/dist/초6/사회·역사/현대사회와평화/초6_사회·역사_현대사회와평화_01_민주주의의발전_학생용.pptx
@@ -120,13 +120,13 @@
   <p:extLst>
     <p:ext uri="{521415D9-36F7-43E2-AB2F-B90AF26B5E84}">
       <p14:sectionLst xmlns:p14="http://schemas.microsoft.com/office/powerpoint/2010/main">
-        <p14:section name="도입" id="{5afe753c-a496-f27c-d0d3-bbbf338c46b9}">
+        <p14:section name="도입" id="{7650d438-81b6-fcd6-d3e6-9778c5b2a7a4}">
           <p14:sldIdLst>
             <p14:sldId id="256"/>
             <p14:sldId id="257"/>
           </p14:sldIdLst>
         </p14:section>
-        <p14:section name="개념" id="{7978c572-a310-6221-4000-520ce05667df}">
+        <p14:section name="개념" id="{65612140-d1ac-6664-c716-32d9b86b96f7}">
           <p14:sldIdLst>
             <p14:sldId id="258"/>
             <p14:sldId id="259"/>
@@ -136,33 +136,33 @@
             <p14:sldId id="266"/>
           </p14:sldIdLst>
         </p14:section>
-        <p14:section name="연습" id="{fa1fe5fd-c54c-173c-37e6-ab7cbb168d99}">
+        <p14:section name="연습" id="{2703586c-2c8c-9490-3c89-f6419c01addb}">
           <p14:sldIdLst>
             <p14:sldId id="261"/>
             <p14:sldId id="264"/>
             <p14:sldId id="265"/>
           </p14:sldIdLst>
         </p14:section>
-        <p14:section name="개념" id="{f98cc46c-7e26-68a6-11d8-bde23d1b7849}">
+        <p14:section name="개념" id="{145139a4-7769-a94b-4e60-04bec989808c}">
           <p14:sldIdLst/>
         </p14:section>
-        <p14:section name="연습" id="{8522d53a-eb11-a02b-d002-14b5a8d23424}">
+        <p14:section name="연습" id="{f44d34ce-5f5d-9b42-ea0b-e383e330b14d}">
           <p14:sldIdLst/>
         </p14:section>
-        <p14:section name="개념" id="{ab338b57-7112-c1c9-541e-637b0b8a1d62}">
+        <p14:section name="개념" id="{d378d2bf-3a7a-8d7a-6201-707643520911}">
           <p14:sldIdLst/>
         </p14:section>
-        <p14:section name="확인" id="{a1cb0d59-3f90-30a7-d135-f650a8d206e8}">
+        <p14:section name="확인" id="{e2df3d4d-ef1d-5866-2811-42c29c5beaf2}">
           <p14:sldIdLst>
             <p14:sldId id="267"/>
           </p14:sldIdLst>
         </p14:section>
-        <p14:section name="정리" id="{08f974ef-784b-3ccb-7132-397b3d9273f7}">
+        <p14:section name="정리" id="{85d4788b-d8c5-3af2-298f-4b9aa9e10fab}">
           <p14:sldIdLst>
             <p14:sldId id="268"/>
           </p14:sldIdLst>
         </p14:section>
-        <p14:section name="보충" id="{4c0dcfce-c8a2-866a-807b-f76c27886911}">
+        <p14:section name="보충" id="{093d8120-6bab-8115-ddfb-bb08fb03599c}">
           <p14:sldIdLst>
             <p14:sldId id="269"/>
           </p14:sldIdLst>
